--- a/slides/announcement.pptx
+++ b/slides/announcement.pptx
@@ -3186,7 +3186,7 @@
             </a:pPr>
             <a:r>
               <a:rPr/>
-              <a:t>June 11, 2026</a:t>
+              <a:t>June 19, 2026</a:t>
             </a:r>
           </a:p>
         </p:txBody>

--- a/slides/announcement.pptx
+++ b/slides/announcement.pptx
@@ -3186,7 +3186,7 @@
             </a:pPr>
             <a:r>
               <a:rPr/>
-              <a:t>June 19, 2026</a:t>
+              <a:t>June 20, 2026</a:t>
             </a:r>
           </a:p>
         </p:txBody>
